--- a/templates/template_Kit-uAlph-ARA-Lab.pptx
+++ b/templates/template_Kit-uAlph-ARA-Lab.pptx
@@ -203,7 +203,7 @@
           <a:p>
             <a:fld id="{EBCAEED2-BC16-4826-88B5-7A60AAAA0FBF}" type="datetimeFigureOut">
               <a:rPr lang="pt-BR" smtClean="0"/>
-              <a:t>23/04/2026</a:t>
+              <a:t>29/04/2026</a:t>
             </a:fld>
             <a:endParaRPr lang="pt-BR"/>
           </a:p>
@@ -709,7 +709,7 @@
           <a:p>
             <a:fld id="{A157E78B-50A5-4041-B8E5-C741E639875A}" type="datetimeFigureOut">
               <a:rPr lang="pt-BR" smtClean="0"/>
-              <a:t>23/04/2026</a:t>
+              <a:t>29/04/2026</a:t>
             </a:fld>
             <a:endParaRPr lang="pt-BR"/>
           </a:p>
@@ -879,7 +879,7 @@
           <a:p>
             <a:fld id="{A157E78B-50A5-4041-B8E5-C741E639875A}" type="datetimeFigureOut">
               <a:rPr lang="pt-BR" smtClean="0"/>
-              <a:t>23/04/2026</a:t>
+              <a:t>29/04/2026</a:t>
             </a:fld>
             <a:endParaRPr lang="pt-BR"/>
           </a:p>
@@ -1059,7 +1059,7 @@
           <a:p>
             <a:fld id="{A157E78B-50A5-4041-B8E5-C741E639875A}" type="datetimeFigureOut">
               <a:rPr lang="pt-BR" smtClean="0"/>
-              <a:t>23/04/2026</a:t>
+              <a:t>29/04/2026</a:t>
             </a:fld>
             <a:endParaRPr lang="pt-BR"/>
           </a:p>
@@ -1229,7 +1229,7 @@
           <a:p>
             <a:fld id="{A157E78B-50A5-4041-B8E5-C741E639875A}" type="datetimeFigureOut">
               <a:rPr lang="pt-BR" smtClean="0"/>
-              <a:t>23/04/2026</a:t>
+              <a:t>29/04/2026</a:t>
             </a:fld>
             <a:endParaRPr lang="pt-BR"/>
           </a:p>
@@ -1475,7 +1475,7 @@
           <a:p>
             <a:fld id="{A157E78B-50A5-4041-B8E5-C741E639875A}" type="datetimeFigureOut">
               <a:rPr lang="pt-BR" smtClean="0"/>
-              <a:t>23/04/2026</a:t>
+              <a:t>29/04/2026</a:t>
             </a:fld>
             <a:endParaRPr lang="pt-BR"/>
           </a:p>
@@ -1707,7 +1707,7 @@
           <a:p>
             <a:fld id="{A157E78B-50A5-4041-B8E5-C741E639875A}" type="datetimeFigureOut">
               <a:rPr lang="pt-BR" smtClean="0"/>
-              <a:t>23/04/2026</a:t>
+              <a:t>29/04/2026</a:t>
             </a:fld>
             <a:endParaRPr lang="pt-BR"/>
           </a:p>
@@ -2074,7 +2074,7 @@
           <a:p>
             <a:fld id="{A157E78B-50A5-4041-B8E5-C741E639875A}" type="datetimeFigureOut">
               <a:rPr lang="pt-BR" smtClean="0"/>
-              <a:t>23/04/2026</a:t>
+              <a:t>29/04/2026</a:t>
             </a:fld>
             <a:endParaRPr lang="pt-BR"/>
           </a:p>
@@ -2192,7 +2192,7 @@
           <a:p>
             <a:fld id="{A157E78B-50A5-4041-B8E5-C741E639875A}" type="datetimeFigureOut">
               <a:rPr lang="pt-BR" smtClean="0"/>
-              <a:t>23/04/2026</a:t>
+              <a:t>29/04/2026</a:t>
             </a:fld>
             <a:endParaRPr lang="pt-BR"/>
           </a:p>
@@ -2287,7 +2287,7 @@
           <a:p>
             <a:fld id="{A157E78B-50A5-4041-B8E5-C741E639875A}" type="datetimeFigureOut">
               <a:rPr lang="pt-BR" smtClean="0"/>
-              <a:t>23/04/2026</a:t>
+              <a:t>29/04/2026</a:t>
             </a:fld>
             <a:endParaRPr lang="pt-BR"/>
           </a:p>
@@ -2564,7 +2564,7 @@
           <a:p>
             <a:fld id="{A157E78B-50A5-4041-B8E5-C741E639875A}" type="datetimeFigureOut">
               <a:rPr lang="pt-BR" smtClean="0"/>
-              <a:t>23/04/2026</a:t>
+              <a:t>29/04/2026</a:t>
             </a:fld>
             <a:endParaRPr lang="pt-BR"/>
           </a:p>
@@ -2821,7 +2821,7 @@
           <a:p>
             <a:fld id="{A157E78B-50A5-4041-B8E5-C741E639875A}" type="datetimeFigureOut">
               <a:rPr lang="pt-BR" smtClean="0"/>
-              <a:t>23/04/2026</a:t>
+              <a:t>29/04/2026</a:t>
             </a:fld>
             <a:endParaRPr lang="pt-BR"/>
           </a:p>
@@ -3034,7 +3034,7 @@
           <a:p>
             <a:fld id="{A157E78B-50A5-4041-B8E5-C741E639875A}" type="datetimeFigureOut">
               <a:rPr lang="pt-BR" smtClean="0"/>
-              <a:t>23/04/2026</a:t>
+              <a:t>29/04/2026</a:t>
             </a:fld>
             <a:endParaRPr lang="pt-BR"/>
           </a:p>
